--- a/templates/diageo_template.pptx
+++ b/templates/diageo_template.pptx
@@ -696,104 +696,6 @@
           </a:p>
         </p:txBody>
       </p:sp>
-      <p:pic>
-        <p:nvPicPr>
-          <p:cNvPr id="5" name="Picture 4" descr="A black background with white text&#10;&#10;Description automatically generated">
-            <a:extLst>
-              <a:ext uri="{FF2B5EF4-FFF2-40B4-BE49-F238E27FC236}">
-                <a16:creationId xmlns:a16="http://schemas.microsoft.com/office/drawing/2014/main" id="{736888A1-6E81-5B07-BB4C-36DDDD792B02}"/>
-              </a:ext>
-            </a:extLst>
-          </p:cNvPr>
-          <p:cNvPicPr>
-            <a:picLocks noChangeAspect="1"/>
-          </p:cNvPicPr>
-          <p:nvPr userDrawn="1"/>
-        </p:nvPicPr>
-        <p:blipFill>
-          <a:blip r:embed="rId6"/>
-          <a:stretch>
-            <a:fillRect/>
-          </a:stretch>
-        </p:blipFill>
-        <p:spPr>
-          <a:xfrm>
-            <a:off x="6624" y="6283168"/>
-            <a:ext cx="1066800" cy="600388"/>
-          </a:xfrm>
-          <a:prstGeom prst="rect">
-            <a:avLst/>
-          </a:prstGeom>
-        </p:spPr>
-      </p:pic>
-      <p:pic>
-        <p:nvPicPr>
-          <p:cNvPr id="6" name="Picture 5" descr="A logo with white text&#10;&#10;Description automatically generated">
-            <a:extLst>
-              <a:ext uri="{FF2B5EF4-FFF2-40B4-BE49-F238E27FC236}">
-                <a16:creationId xmlns:a16="http://schemas.microsoft.com/office/drawing/2014/main" id="{26C94DF9-64EF-0448-58F0-649293DFF915}"/>
-              </a:ext>
-            </a:extLst>
-          </p:cNvPr>
-          <p:cNvPicPr>
-            <a:picLocks noChangeAspect="1"/>
-          </p:cNvPicPr>
-          <p:nvPr userDrawn="1"/>
-        </p:nvPicPr>
-        <p:blipFill>
-          <a:blip r:embed="rId7"/>
-          <a:stretch>
-            <a:fillRect/>
-          </a:stretch>
-        </p:blipFill>
-        <p:spPr>
-          <a:xfrm>
-            <a:off x="11054330" y="6238557"/>
-            <a:ext cx="1127297" cy="634435"/>
-          </a:xfrm>
-          <a:prstGeom prst="rect">
-            <a:avLst/>
-          </a:prstGeom>
-        </p:spPr>
-      </p:pic>
-      <p:pic>
-        <p:nvPicPr>
-          <p:cNvPr id="3" name="Picture 2">
-            <a:extLst>
-              <a:ext uri="{FF2B5EF4-FFF2-40B4-BE49-F238E27FC236}">
-                <a16:creationId xmlns:a16="http://schemas.microsoft.com/office/drawing/2014/main" id="{35CC88F6-4686-08AB-8698-EC41AAC1DD21}"/>
-              </a:ext>
-            </a:extLst>
-          </p:cNvPr>
-          <p:cNvPicPr>
-            <a:picLocks noChangeAspect="1"/>
-          </p:cNvPicPr>
-          <p:nvPr userDrawn="1"/>
-        </p:nvPicPr>
-        <p:blipFill>
-          <a:blip r:embed="rId8" cstate="email">
-            <a:lum bright="100000" contrast="100000"/>
-            <a:extLst>
-              <a:ext uri="{28A0092B-C50C-407E-A947-70E740481C1C}">
-                <a14:useLocalDpi xmlns:a14="http://schemas.microsoft.com/office/drawing/2010/main"/>
-              </a:ext>
-            </a:extLst>
-          </a:blip>
-          <a:stretch>
-            <a:fillRect/>
-          </a:stretch>
-        </p:blipFill>
-        <p:spPr>
-          <a:xfrm>
-            <a:off x="10285852" y="6427308"/>
-            <a:ext cx="673869" cy="312108"/>
-          </a:xfrm>
-          <a:prstGeom prst="rect">
-            <a:avLst/>
-          </a:prstGeom>
-          <a:noFill/>
-        </p:spPr>
-      </p:pic>
     </p:spTree>
     <p:extLst>
       <p:ext uri="{BB962C8B-B14F-4D97-AF65-F5344CB8AC3E}">
@@ -985,44 +887,6 @@
           </a:p>
         </p:txBody>
       </p:sp>
-      <p:pic>
-        <p:nvPicPr>
-          <p:cNvPr id="5" name="Picture 4">
-            <a:extLst>
-              <a:ext uri="{FF2B5EF4-FFF2-40B4-BE49-F238E27FC236}">
-                <a16:creationId xmlns:a16="http://schemas.microsoft.com/office/drawing/2014/main" id="{C8AC47EE-F6C6-9DE9-7508-9EA7232ECE21}"/>
-              </a:ext>
-            </a:extLst>
-          </p:cNvPr>
-          <p:cNvPicPr>
-            <a:picLocks noChangeAspect="1"/>
-          </p:cNvPicPr>
-          <p:nvPr userDrawn="1"/>
-        </p:nvPicPr>
-        <p:blipFill>
-          <a:blip r:embed="rId6" cstate="email">
-            <a:lum bright="100000" contrast="100000"/>
-            <a:extLst>
-              <a:ext uri="{28A0092B-C50C-407E-A947-70E740481C1C}">
-                <a14:useLocalDpi xmlns:a14="http://schemas.microsoft.com/office/drawing/2010/main"/>
-              </a:ext>
-            </a:extLst>
-          </a:blip>
-          <a:stretch>
-            <a:fillRect/>
-          </a:stretch>
-        </p:blipFill>
-        <p:spPr>
-          <a:xfrm>
-            <a:off x="10285852" y="6427308"/>
-            <a:ext cx="673869" cy="312108"/>
-          </a:xfrm>
-          <a:prstGeom prst="rect">
-            <a:avLst/>
-          </a:prstGeom>
-          <a:noFill/>
-        </p:spPr>
-      </p:pic>
     </p:spTree>
     <p:extLst>
       <p:ext uri="{BB962C8B-B14F-4D97-AF65-F5344CB8AC3E}">
@@ -1127,54 +991,6 @@
       </p:graphicFrame>
       <p:sp>
         <p:nvSpPr>
-          <p:cNvPr id="2" name="Footer Placeholder 4">
-            <a:extLst>
-              <a:ext uri="{FF2B5EF4-FFF2-40B4-BE49-F238E27FC236}">
-                <a16:creationId xmlns:a16="http://schemas.microsoft.com/office/drawing/2014/main" id="{A894AC05-F7DC-D5BD-8039-CC07EAB50C14}"/>
-              </a:ext>
-            </a:extLst>
-          </p:cNvPr>
-          <p:cNvSpPr>
-            <a:spLocks noGrp="1"/>
-          </p:cNvSpPr>
-          <p:nvPr>
-            <p:ph type="ftr" sz="quarter" idx="3"/>
-          </p:nvPr>
-        </p:nvSpPr>
-        <p:spPr>
-          <a:xfrm>
-            <a:off x="1615748" y="6502084"/>
-            <a:ext cx="3469897" cy="153000"/>
-          </a:xfrm>
-          <a:prstGeom prst="rect">
-            <a:avLst/>
-          </a:prstGeom>
-        </p:spPr>
-        <p:txBody>
-          <a:bodyPr vert="horz" lIns="0" tIns="0" rIns="0" bIns="0" rtlCol="0" anchor="t" anchorCtr="0"/>
-          <a:lstStyle>
-            <a:lvl1pPr algn="l">
-              <a:lnSpc>
-                <a:spcPct val="100000"/>
-              </a:lnSpc>
-              <a:defRPr sz="950" i="1" spc="5" baseline="0">
-                <a:solidFill>
-                  <a:schemeClr val="tx1"/>
-                </a:solidFill>
-                <a:latin typeface="+mj-lt"/>
-              </a:defRPr>
-            </a:lvl1pPr>
-          </a:lstStyle>
-          <a:p>
-            <a:r>
-              <a:rPr lang="en-GB"/>
-              <a:t>PRIVATE &amp; CONFIDENTIAL</a:t>
-            </a:r>
-          </a:p>
-        </p:txBody>
-      </p:sp>
-      <p:sp>
-        <p:nvSpPr>
           <p:cNvPr id="3" name="Slide Number Placeholder 5">
             <a:extLst>
               <a:ext uri="{FF2B5EF4-FFF2-40B4-BE49-F238E27FC236}">
@@ -1191,8 +1007,8 @@
         </p:nvSpPr>
         <p:spPr>
           <a:xfrm>
-            <a:off x="1188245" y="6502084"/>
-            <a:ext cx="180000" cy="153000"/>
+            <a:off x="11274552" y="6492240"/>
+            <a:ext cx="457200" cy="155448"/>
           </a:xfrm>
           <a:prstGeom prst="rect">
             <a:avLst/>
@@ -1201,7 +1017,7 @@
         <p:txBody>
           <a:bodyPr vert="horz" lIns="0" tIns="0" rIns="0" bIns="0" rtlCol="0" anchor="t" anchorCtr="0"/>
           <a:lstStyle>
-            <a:lvl1pPr algn="ctr">
+            <a:lvl1pPr algn="r">
               <a:lnSpc>
                 <a:spcPct val="100000"/>
               </a:lnSpc>
@@ -1354,36 +1170,6 @@
           </a:graphicData>
         </a:graphic>
       </p:graphicFrame>
-      <p:pic>
-        <p:nvPicPr>
-          <p:cNvPr id="12" name="Picture 11" descr="A black background with a black square&#10;&#10;Description automatically generated with medium confidence">
-            <a:extLst>
-              <a:ext uri="{FF2B5EF4-FFF2-40B4-BE49-F238E27FC236}">
-                <a16:creationId xmlns:a16="http://schemas.microsoft.com/office/drawing/2014/main" id="{787F2C52-A8C8-2DD8-A772-57531E996D33}"/>
-              </a:ext>
-            </a:extLst>
-          </p:cNvPr>
-          <p:cNvPicPr>
-            <a:picLocks noChangeAspect="1"/>
-          </p:cNvPicPr>
-          <p:nvPr userDrawn="1"/>
-        </p:nvPicPr>
-        <p:blipFill>
-          <a:blip r:embed="rId33"/>
-          <a:stretch>
-            <a:fillRect/>
-          </a:stretch>
-        </p:blipFill>
-        <p:spPr>
-          <a:xfrm>
-            <a:off x="169049" y="6502242"/>
-            <a:ext cx="748800" cy="162240"/>
-          </a:xfrm>
-          <a:prstGeom prst="rect">
-            <a:avLst/>
-          </a:prstGeom>
-        </p:spPr>
-      </p:pic>
       <p:sp>
         <p:nvSpPr>
           <p:cNvPr id="2" name="Title Placeholder 1"/>
@@ -1484,126 +1270,6 @@
           </a:p>
         </p:txBody>
       </p:sp>
-      <p:pic>
-        <p:nvPicPr>
-          <p:cNvPr id="7" name="Picture 6" descr="A logo with blue lines and black background&#10;&#10;Description automatically generated">
-            <a:extLst>
-              <a:ext uri="{FF2B5EF4-FFF2-40B4-BE49-F238E27FC236}">
-                <a16:creationId xmlns:a16="http://schemas.microsoft.com/office/drawing/2014/main" id="{505AA02B-11F8-6DAE-60AE-7C94F9F8EDAE}"/>
-              </a:ext>
-            </a:extLst>
-          </p:cNvPr>
-          <p:cNvPicPr>
-            <a:picLocks noChangeAspect="1"/>
-          </p:cNvPicPr>
-          <p:nvPr userDrawn="1"/>
-        </p:nvPicPr>
-        <p:blipFill>
-          <a:blip r:embed="rId34">
-            <a:extLst>
-              <a:ext uri="{28A0092B-C50C-407E-A947-70E740481C1C}">
-                <a14:useLocalDpi xmlns:a14="http://schemas.microsoft.com/office/drawing/2010/main" val="0"/>
-              </a:ext>
-            </a:extLst>
-          </a:blip>
-          <a:stretch>
-            <a:fillRect/>
-          </a:stretch>
-        </p:blipFill>
-        <p:spPr>
-          <a:xfrm>
-            <a:off x="11054762" y="6240710"/>
-            <a:ext cx="1123197" cy="631798"/>
-          </a:xfrm>
-          <a:prstGeom prst="rect">
-            <a:avLst/>
-          </a:prstGeom>
-        </p:spPr>
-      </p:pic>
-      <p:pic>
-        <p:nvPicPr>
-          <p:cNvPr id="4" name="Picture 3">
-            <a:extLst>
-              <a:ext uri="{FF2B5EF4-FFF2-40B4-BE49-F238E27FC236}">
-                <a16:creationId xmlns:a16="http://schemas.microsoft.com/office/drawing/2014/main" id="{68F3EA57-5156-9A27-C154-6B57100BD962}"/>
-              </a:ext>
-            </a:extLst>
-          </p:cNvPr>
-          <p:cNvPicPr>
-            <a:picLocks noChangeAspect="1"/>
-          </p:cNvPicPr>
-          <p:nvPr userDrawn="1"/>
-        </p:nvPicPr>
-        <p:blipFill>
-          <a:blip r:embed="rId35" cstate="email">
-            <a:extLst>
-              <a:ext uri="{28A0092B-C50C-407E-A947-70E740481C1C}">
-                <a14:useLocalDpi xmlns:a14="http://schemas.microsoft.com/office/drawing/2010/main"/>
-              </a:ext>
-            </a:extLst>
-          </a:blip>
-          <a:stretch>
-            <a:fillRect/>
-          </a:stretch>
-        </p:blipFill>
-        <p:spPr>
-          <a:xfrm>
-            <a:off x="10285852" y="6427308"/>
-            <a:ext cx="673869" cy="312108"/>
-          </a:xfrm>
-          <a:prstGeom prst="rect">
-            <a:avLst/>
-          </a:prstGeom>
-        </p:spPr>
-      </p:pic>
-      <p:sp>
-        <p:nvSpPr>
-          <p:cNvPr id="5" name="Footer Placeholder 4">
-            <a:extLst>
-              <a:ext uri="{FF2B5EF4-FFF2-40B4-BE49-F238E27FC236}">
-                <a16:creationId xmlns:a16="http://schemas.microsoft.com/office/drawing/2014/main" id="{A7CFB2C2-B8B9-2B85-74C6-675775D0909B}"/>
-              </a:ext>
-            </a:extLst>
-          </p:cNvPr>
-          <p:cNvSpPr>
-            <a:spLocks noGrp="1"/>
-          </p:cNvSpPr>
-          <p:nvPr>
-            <p:ph type="ftr" sz="quarter" idx="3"/>
-          </p:nvPr>
-        </p:nvSpPr>
-        <p:spPr>
-          <a:xfrm>
-            <a:off x="1615748" y="6502084"/>
-            <a:ext cx="3469897" cy="153000"/>
-          </a:xfrm>
-          <a:prstGeom prst="rect">
-            <a:avLst/>
-          </a:prstGeom>
-        </p:spPr>
-        <p:txBody>
-          <a:bodyPr vert="horz" lIns="0" tIns="0" rIns="0" bIns="0" rtlCol="0" anchor="t" anchorCtr="0"/>
-          <a:lstStyle>
-            <a:lvl1pPr algn="l">
-              <a:lnSpc>
-                <a:spcPct val="100000"/>
-              </a:lnSpc>
-              <a:defRPr sz="950" i="1" spc="5" baseline="0">
-                <a:solidFill>
-                  <a:schemeClr val="tx1"/>
-                </a:solidFill>
-                <a:latin typeface="+mj-lt"/>
-              </a:defRPr>
-            </a:lvl1pPr>
-          </a:lstStyle>
-          <a:p>
-            <a:r>
-              <a:rPr lang="en-GB"/>
-              <a:t>PRIVATE &amp; CONFIDENTIAL</a:t>
-            </a:r>
-          </a:p>
-        </p:txBody>
-      </p:sp>
       <p:sp>
         <p:nvSpPr>
           <p:cNvPr id="6" name="Slide Number Placeholder 5">
@@ -1622,8 +1288,8 @@
         </p:nvSpPr>
         <p:spPr>
           <a:xfrm>
-            <a:off x="1188245" y="6502084"/>
-            <a:ext cx="180000" cy="153000"/>
+            <a:off x="11274552" y="6492240"/>
+            <a:ext cx="457200" cy="155448"/>
           </a:xfrm>
           <a:prstGeom prst="rect">
             <a:avLst/>
@@ -1632,7 +1298,7 @@
         <p:txBody>
           <a:bodyPr vert="horz" lIns="0" tIns="0" rIns="0" bIns="0" rtlCol="0" anchor="t" anchorCtr="0"/>
           <a:lstStyle>
-            <a:lvl1pPr algn="ctr">
+            <a:lvl1pPr algn="r">
               <a:lnSpc>
                 <a:spcPct val="100000"/>
               </a:lnSpc>
@@ -1653,47 +1319,6 @@
           </a:p>
         </p:txBody>
       </p:sp>
-      <p:cxnSp>
-        <p:nvCxnSpPr>
-          <p:cNvPr id="9" name="Straight Connector 8">
-            <a:extLst>
-              <a:ext uri="{FF2B5EF4-FFF2-40B4-BE49-F238E27FC236}">
-                <a16:creationId xmlns:a16="http://schemas.microsoft.com/office/drawing/2014/main" id="{8057537D-D47C-48DE-20AE-3C02CEFACD1A}"/>
-              </a:ext>
-            </a:extLst>
-          </p:cNvPr>
-          <p:cNvCxnSpPr/>
-          <p:nvPr userDrawn="1"/>
-        </p:nvCxnSpPr>
-        <p:spPr>
-          <a:xfrm>
-            <a:off x="1482531" y="6523834"/>
-            <a:ext cx="0" cy="108000"/>
-          </a:xfrm>
-          <a:prstGeom prst="line">
-            <a:avLst/>
-          </a:prstGeom>
-          <a:ln w="19050">
-            <a:solidFill>
-              <a:schemeClr val="tx1"/>
-            </a:solidFill>
-          </a:ln>
-        </p:spPr>
-        <p:style>
-          <a:lnRef idx="1">
-            <a:schemeClr val="accent1"/>
-          </a:lnRef>
-          <a:fillRef idx="0">
-            <a:schemeClr val="accent1"/>
-          </a:fillRef>
-          <a:effectRef idx="0">
-            <a:schemeClr val="accent1"/>
-          </a:effectRef>
-          <a:fontRef idx="minor">
-            <a:schemeClr val="tx1"/>
-          </a:fontRef>
-        </p:style>
-      </p:cxnSp>
     </p:spTree>
     <p:extLst>
       <p:ext uri="{BB962C8B-B14F-4D97-AF65-F5344CB8AC3E}">
